--- a/files/Aethic_Reasoning_10min.pptx
+++ b/files/Aethic_Reasoning_10min.pptx
@@ -1392,10 +1392,8 @@
           <a:lstStyle/>
           <a:p>
             <a:r>
-              <a:rPr lang="en-US" dirty="0"/>
-              <a:t>That's the logical sector. Add exactly one quantitative input — Feynman's phase, e to the i S over h-bar, over paths, composed in pairs — and here's the result. Of the seven axioms of standard quantum mechanics, six come back as theorems. The seventh, the Born rule, isn't posited beside the state space; it's absorbed into the one weight law. And the measurement axiom, the projection axiom, the observables axiom — gone. Not reinterpreted. Gone. The projection postulate is just the third postulate at work on a record.</a:t>
-            </a:r>
-            <a:endParaRPr lang="en-US" dirty="0"/>
+              <a:t>That's the logical sector. Add exactly one quantitative input — Feynman's phase, e to the i S over h-bar, over paths, composed in pairs — and here's the result, graded honestly. Of the seven axioms of standard quantum mechanics, two come back as theorems of the postulates: the rule for observables, and the projection postulate. Four — the state space, superposition, composites, and unitary evolution — are what the kernel itself says; you read them off it. And the seventh, the Born rule, isn't posited beside the state space; it's absorbed into the one weight law. So the measurement axiom, the projection axiom, the observables axiom — gone. Not reinterpreted. Gone. The projection postulate is just the third postulate at work on a record.</a:t>
+            </a:r>
           </a:p>
         </p:txBody>
       </p:sp>
@@ -7243,6 +7241,10 @@
             <a:prstDash val="solid"/>
           </a:ln>
         </p:spPr>
+        <p:txBody>
+          <a:bodyPr/>
+          <a:p/>
+        </p:txBody>
       </p:sp>
       <p:sp>
         <p:nvSpPr>
@@ -7316,7 +7318,7 @@
                 <a:ea typeface="Cambria" pitchFamily="34" charset="-122"/>
                 <a:cs typeface="Cambria" pitchFamily="34" charset="-120"/>
               </a:rPr>
-              <a:t>6 of 7</a:t>
+              <a:t>2 of 7</a:t>
             </a:r>
             <a:endParaRPr lang="en-US" sz="4800" dirty="0"/>
           </a:p>
@@ -7355,7 +7357,7 @@
                 <a:ea typeface="Calibri" pitchFamily="34" charset="-122"/>
                 <a:cs typeface="Calibri" pitchFamily="34" charset="-120"/>
               </a:rPr>
-              <a:t>Dirac–von Neumann axioms recovered as theorems</a:t>
+              <a:t>axioms recovered as theorems of the postulates: observables and projection</a:t>
             </a:r>
             <a:endParaRPr lang="en-US" sz="1200" dirty="0"/>
           </a:p>
@@ -7433,7 +7435,7 @@
                 <a:ea typeface="Calibri" pitchFamily="34" charset="-122"/>
                 <a:cs typeface="Calibri" pitchFamily="34" charset="-120"/>
               </a:rPr>
-              <a:t>axiom absorbed: the Born rule, into the one weight law</a:t>
+              <a:t>axiom absorbed: the Born rule, into the one weight law; four more are the kernel's own content</a:t>
             </a:r>
             <a:endParaRPr lang="en-US" sz="1200" dirty="0"/>
           </a:p>
@@ -7543,6 +7545,10 @@
             <a:prstDash val="solid"/>
           </a:ln>
         </p:spPr>
+        <p:txBody>
+          <a:bodyPr/>
+          <a:p/>
+        </p:txBody>
       </p:sp>
       <p:sp>
         <p:nvSpPr>
